--- a/deck/02. Immobweb - Machine Learning.pptx
+++ b/deck/02. Immobweb - Machine Learning.pptx
@@ -1135,7 +1135,23 @@
             </a:r>
             <a:r>
               <a:rPr lang="en-US" dirty="0"/>
-              <a:t> improves generalization but is computationally expensive.</a:t>
+              <a:t> improves </a:t>
+            </a:r>
+            <a:r>
+              <a:rPr lang="en-US" b="1" dirty="0"/>
+              <a:t>generalization</a:t>
+            </a:r>
+            <a:r>
+              <a:rPr lang="en-US" dirty="0"/>
+              <a:t> but </a:t>
+            </a:r>
+            <a:r>
+              <a:rPr lang="en-US" b="1" dirty="0"/>
+              <a:t>is computationally expensive</a:t>
+            </a:r>
+            <a:r>
+              <a:rPr lang="en-US" dirty="0"/>
+              <a:t>.</a:t>
             </a:r>
           </a:p>
           <a:p>
@@ -1287,7 +1303,7 @@
             </a:pPr>
             <a:r>
               <a:rPr lang="en-US" b="1" dirty="0"/>
-              <a:t>--- Train / test strategy ---</a:t>
+              <a:t>--- For our Train / test strategy ---</a:t>
             </a:r>
           </a:p>
           <a:p>
@@ -1304,7 +1320,17 @@
             </a:pPr>
             <a:r>
               <a:rPr lang="en-US" dirty="0"/>
-              <a:t>We followed a standard 80/20 Train/Test split for all models.</a:t>
+              <a:t>We used 80% of the dataset for training</a:t>
+            </a:r>
+          </a:p>
+          <a:p>
+            <a:pPr marL="171450" indent="-171450">
+              <a:buFont typeface="Arial" panose="020B0604020202020204" pitchFamily="34" charset="0"/>
+              <a:buChar char="•"/>
+            </a:pPr>
+            <a:r>
+              <a:rPr lang="en-US" dirty="0"/>
+              <a:t> and 20% for testing.</a:t>
             </a:r>
             <a:br>
               <a:rPr lang="en-US" dirty="0"/>
@@ -1312,30 +1338,186 @@
             <a:endParaRPr lang="en-US" dirty="0"/>
           </a:p>
           <a:p>
+            <a:r>
+              <a:rPr lang="en-US" b="1" dirty="0"/>
+              <a:t>For </a:t>
+            </a:r>
+            <a:r>
+              <a:rPr lang="en-US" b="1" dirty="0" err="1"/>
+              <a:t>XGBoost</a:t>
+            </a:r>
+            <a:r>
+              <a:rPr lang="en-US" b="1" dirty="0"/>
+              <a:t> and </a:t>
+            </a:r>
+            <a:r>
+              <a:rPr lang="en-US" b="1" dirty="0" err="1"/>
+              <a:t>CatBoost</a:t>
+            </a:r>
+            <a:r>
+              <a:rPr lang="en-US" dirty="0"/>
+              <a:t>, </a:t>
+            </a:r>
+          </a:p>
+          <a:p>
+            <a:pPr marL="171450" indent="-171450">
+              <a:buFont typeface="Wingdings" panose="05000000000000000000" pitchFamily="2" charset="2"/>
+              <a:buChar char="à"/>
+            </a:pPr>
+            <a:r>
+              <a:rPr lang="en-US" dirty="0"/>
+              <a:t>we used </a:t>
+            </a:r>
+            <a:r>
+              <a:rPr lang="en-US" b="1" dirty="0"/>
+              <a:t>5-Fold Cross Validation</a:t>
+            </a:r>
+            <a:r>
+              <a:rPr lang="en-US" dirty="0"/>
+              <a:t> </a:t>
+            </a:r>
+          </a:p>
+          <a:p>
+            <a:pPr marL="171450" indent="-171450">
+              <a:buFont typeface="Wingdings" panose="05000000000000000000" pitchFamily="2" charset="2"/>
+              <a:buChar char="à"/>
+            </a:pPr>
+            <a:r>
+              <a:rPr lang="en-US" dirty="0"/>
+              <a:t>combined with </a:t>
+            </a:r>
+            <a:r>
+              <a:rPr lang="en-US" b="1" dirty="0" err="1"/>
+              <a:t>Optuna</a:t>
+            </a:r>
+            <a:r>
+              <a:rPr lang="en-US" dirty="0"/>
+              <a:t> for hyperparameter tuning.</a:t>
+            </a:r>
+          </a:p>
+          <a:p>
+            <a:endParaRPr lang="en-US" dirty="0"/>
+          </a:p>
+          <a:p>
+            <a:r>
+              <a:rPr lang="en-US" dirty="0"/>
+              <a:t>So</a:t>
+            </a:r>
+          </a:p>
+          <a:p>
+            <a:endParaRPr lang="en-US" dirty="0"/>
+          </a:p>
+          <a:p>
+            <a:r>
+              <a:rPr lang="en-US" b="1" i="0" dirty="0"/>
+              <a:t>We</a:t>
+            </a:r>
+            <a:r>
+              <a:rPr lang="en-US" i="0" dirty="0"/>
+              <a:t> </a:t>
+            </a:r>
+            <a:r>
+              <a:rPr lang="en-US" b="1" i="0" dirty="0"/>
+              <a:t>split your training data into 5 equal parts</a:t>
+            </a:r>
+            <a:endParaRPr lang="en-US" i="0" dirty="0"/>
+          </a:p>
+          <a:p>
+            <a:pPr marL="171450" indent="-171450">
+              <a:buFont typeface="Wingdings" panose="05000000000000000000" pitchFamily="2" charset="2"/>
+              <a:buChar char="Ø"/>
+            </a:pPr>
+            <a:r>
+              <a:rPr lang="en-US" i="0" dirty="0"/>
+              <a:t>We run </a:t>
+            </a:r>
+            <a:r>
+              <a:rPr lang="en-US" b="1" i="0" dirty="0"/>
+              <a:t>5 training rounds</a:t>
+            </a:r>
+            <a:r>
+              <a:rPr lang="en-US" i="0" dirty="0"/>
+              <a:t>. </a:t>
+            </a:r>
+          </a:p>
+          <a:p>
+            <a:pPr marL="171450" indent="-171450">
+              <a:buFont typeface="Wingdings" panose="05000000000000000000" pitchFamily="2" charset="2"/>
+              <a:buChar char="Ø"/>
+            </a:pPr>
+            <a:r>
+              <a:rPr lang="en-US" i="0" dirty="0"/>
+              <a:t>And the </a:t>
+            </a:r>
+            <a:r>
+              <a:rPr lang="en-US" b="1" i="0" dirty="0"/>
+              <a:t>remaining 1-fold was used to test the model</a:t>
+            </a:r>
+          </a:p>
+          <a:p>
+            <a:pPr marL="171450" indent="-171450">
+              <a:buFont typeface="Wingdings" panose="05000000000000000000" pitchFamily="2" charset="2"/>
+              <a:buChar char="Ø"/>
+            </a:pPr>
+            <a:endParaRPr lang="en-US" b="1" i="0" dirty="0"/>
+          </a:p>
+          <a:p>
+            <a:pPr marL="171450" indent="-171450">
+              <a:buFont typeface="Wingdings" panose="05000000000000000000" pitchFamily="2" charset="2"/>
+              <a:buChar char="è"/>
+            </a:pPr>
+            <a:r>
+              <a:rPr lang="en-US" i="0" dirty="0"/>
+              <a:t>And finally , </a:t>
+            </a:r>
+          </a:p>
+          <a:p>
+            <a:pPr marL="171450" indent="-171450">
+              <a:buFont typeface="Wingdings" panose="05000000000000000000" pitchFamily="2" charset="2"/>
+              <a:buChar char="è"/>
+            </a:pPr>
+            <a:r>
+              <a:rPr lang="en-US" i="0" dirty="0"/>
+              <a:t>we used the 20% of </a:t>
+            </a:r>
+            <a:r>
+              <a:rPr lang="en-US" b="1" i="0" dirty="0"/>
+              <a:t>untouched test set, </a:t>
+            </a:r>
+          </a:p>
+          <a:p>
+            <a:pPr marL="171450" indent="-171450">
+              <a:buFont typeface="Wingdings" panose="05000000000000000000" pitchFamily="2" charset="2"/>
+              <a:buChar char="è"/>
+            </a:pPr>
+            <a:r>
+              <a:rPr lang="en-US" i="0" dirty="0"/>
+              <a:t>for the </a:t>
+            </a:r>
+            <a:r>
+              <a:rPr lang="en-US" b="1" i="0" dirty="0"/>
+              <a:t>final evaluation</a:t>
+            </a:r>
+            <a:r>
+              <a:rPr lang="en-US" i="0" dirty="0"/>
+              <a:t>.</a:t>
+            </a:r>
+          </a:p>
+          <a:p>
+            <a:endParaRPr lang="en-US" dirty="0"/>
+          </a:p>
+          <a:p>
+            <a:r>
+              <a:rPr lang="en-US" b="1" dirty="0"/>
+              <a:t>--- Regarding feature selection ---</a:t>
+            </a:r>
+          </a:p>
+          <a:p>
             <a:pPr marL="0" indent="0">
               <a:buFont typeface="Arial" panose="020B0604020202020204" pitchFamily="34" charset="0"/>
               <a:buNone/>
             </a:pPr>
-            <a:r>
-              <a:rPr lang="en-US" dirty="0"/>
-              <a:t>For </a:t>
-            </a:r>
-            <a:r>
-              <a:rPr lang="en-US" dirty="0" err="1"/>
-              <a:t>XGBoost</a:t>
-            </a:r>
-            <a:r>
-              <a:rPr lang="en-US" dirty="0"/>
-              <a:t> and </a:t>
-            </a:r>
-            <a:r>
-              <a:rPr lang="en-US" dirty="0" err="1"/>
-              <a:t>CatBoost</a:t>
-            </a:r>
-            <a:r>
-              <a:rPr lang="en-US" dirty="0"/>
-              <a:t>, we used 5-Fold Cross Validation on the training set</a:t>
-            </a:r>
+            <a:endParaRPr lang="en-US" dirty="0"/>
           </a:p>
           <a:p>
             <a:pPr marL="0" indent="0">
@@ -1344,78 +1526,54 @@
             </a:pPr>
             <a:r>
               <a:rPr lang="en-US" dirty="0"/>
-              <a:t>This means : </a:t>
+              <a:t>Were trained on, both: </a:t>
+            </a:r>
+          </a:p>
+          <a:p>
+            <a:pPr marL="171450" indent="-171450">
+              <a:buFont typeface="Arial" panose="020B0604020202020204" pitchFamily="34" charset="0"/>
+              <a:buChar char="•"/>
+            </a:pPr>
+            <a:r>
+              <a:rPr lang="en-US" b="1" dirty="0"/>
+              <a:t>Full feature set </a:t>
+            </a:r>
+            <a:r>
+              <a:rPr lang="en-US" dirty="0"/>
+              <a:t>with </a:t>
+            </a:r>
+            <a:r>
+              <a:rPr lang="en-US" b="1" dirty="0"/>
+              <a:t>high variance</a:t>
+            </a:r>
+            <a:r>
+              <a:rPr lang="en-US" dirty="0"/>
+              <a:t>,</a:t>
+            </a:r>
+          </a:p>
+          <a:p>
+            <a:pPr marL="171450" indent="-171450">
+              <a:buFont typeface="Arial" panose="020B0604020202020204" pitchFamily="34" charset="0"/>
+              <a:buChar char="•"/>
+            </a:pPr>
+            <a:r>
+              <a:rPr lang="en-US" dirty="0"/>
+              <a:t>and the </a:t>
+            </a:r>
+            <a:r>
+              <a:rPr lang="en-US" b="1" dirty="0"/>
+              <a:t>top 30 most important features</a:t>
             </a:r>
             <a:br>
               <a:rPr lang="en-US" dirty="0"/>
             </a:br>
             <a:r>
               <a:rPr lang="en-US" dirty="0"/>
-              <a:t>	-&gt; </a:t>
-            </a:r>
-            <a:r>
-              <a:rPr lang="en-US" i="1" dirty="0"/>
-              <a:t>the training data is split into 5 parts; </a:t>
-            </a:r>
-          </a:p>
-          <a:p>
-            <a:pPr marL="0" indent="0">
-              <a:buFont typeface="Arial" panose="020B0604020202020204" pitchFamily="34" charset="0"/>
-              <a:buNone/>
-            </a:pPr>
-            <a:r>
-              <a:rPr lang="en-US" i="1" dirty="0"/>
-              <a:t>	-&gt;each part is used once for validation while the others are used for training.</a:t>
-            </a:r>
-            <a:br>
-              <a:rPr lang="en-US" dirty="0"/>
-            </a:br>
-            <a:endParaRPr lang="en-US" dirty="0"/>
-          </a:p>
-          <a:p>
-            <a:pPr marL="0" indent="0">
-              <a:buFont typeface="Arial" panose="020B0604020202020204" pitchFamily="34" charset="0"/>
-              <a:buNone/>
-            </a:pPr>
+              <a:t>→ that we selected using a </a:t>
+            </a:r>
             <a:r>
               <a:rPr lang="en-US" b="1" dirty="0"/>
-              <a:t>The test set stayed untouched </a:t>
-            </a:r>
-            <a:r>
-              <a:rPr lang="en-US" dirty="0"/>
-              <a:t>until final evaluation.</a:t>
-            </a:r>
-            <a:br>
-              <a:rPr lang="en-US" dirty="0"/>
-            </a:br>
-            <a:endParaRPr lang="en-US" dirty="0"/>
-          </a:p>
-          <a:p>
-            <a:pPr marL="0" indent="0">
-              <a:buFont typeface="Arial" panose="020B0604020202020204" pitchFamily="34" charset="0"/>
-              <a:buNone/>
-            </a:pPr>
-            <a:r>
-              <a:rPr lang="en-US" i="1" dirty="0"/>
-              <a:t>In test mode, </a:t>
-            </a:r>
-          </a:p>
-          <a:p>
-            <a:pPr marL="0" indent="0">
-              <a:buFont typeface="Arial" panose="020B0604020202020204" pitchFamily="34" charset="0"/>
-              <a:buNone/>
-            </a:pPr>
-            <a:r>
-              <a:rPr lang="en-US" i="1" dirty="0"/>
-              <a:t>-&gt; we reduced folds and sample size to speed up </a:t>
-            </a:r>
-            <a:r>
-              <a:rPr lang="en-US" i="1" dirty="0" err="1"/>
-              <a:t>Optuna</a:t>
-            </a:r>
-            <a:r>
-              <a:rPr lang="en-US" i="1" dirty="0"/>
-              <a:t> tuning.</a:t>
+              <a:t>Random Forest model.</a:t>
             </a:r>
           </a:p>
           <a:p>
@@ -1427,77 +1585,8 @@
           </a:p>
           <a:p>
             <a:r>
-              <a:rPr lang="en-US" b="1" dirty="0"/>
-              <a:t>--- Feature selection ---</a:t>
-            </a:r>
-          </a:p>
-          <a:p>
-            <a:endParaRPr lang="en-US" dirty="0"/>
-          </a:p>
-          <a:p>
-            <a:pPr marL="171450" indent="-171450">
-              <a:buFont typeface="Arial" panose="020B0604020202020204" pitchFamily="34" charset="0"/>
-              <a:buChar char="•"/>
-            </a:pPr>
-            <a:r>
               <a:rPr lang="en-US" dirty="0"/>
-              <a:t>We first removed low-variance features using a Variance Threshold.</a:t>
-            </a:r>
-          </a:p>
-          <a:p>
-            <a:pPr marL="0" indent="0">
-              <a:buFont typeface="Arial" panose="020B0604020202020204" pitchFamily="34" charset="0"/>
-              <a:buNone/>
-            </a:pPr>
-            <a:r>
-              <a:rPr lang="en-US" dirty="0"/>
-              <a:t>     -&gt; features that vary very little and don’t help prediction.</a:t>
-            </a:r>
-          </a:p>
-          <a:p>
-            <a:pPr marL="0" indent="0">
-              <a:buFont typeface="Arial" panose="020B0604020202020204" pitchFamily="34" charset="0"/>
-              <a:buNone/>
-            </a:pPr>
-            <a:endParaRPr lang="en-US" dirty="0"/>
-          </a:p>
-          <a:p>
-            <a:pPr marL="171450" indent="-171450">
-              <a:buFont typeface="Arial" panose="020B0604020202020204" pitchFamily="34" charset="0"/>
-              <a:buChar char="•"/>
-            </a:pPr>
-            <a:r>
-              <a:rPr lang="en-US" dirty="0"/>
-              <a:t>Then, we selected the top 30 most important features using Random Forest.</a:t>
-            </a:r>
-          </a:p>
-          <a:p>
-            <a:pPr marL="171450" indent="-171450">
-              <a:buFont typeface="Arial" panose="020B0604020202020204" pitchFamily="34" charset="0"/>
-              <a:buChar char="•"/>
-            </a:pPr>
-            <a:endParaRPr lang="en-US" dirty="0"/>
-          </a:p>
-          <a:p>
-            <a:pPr marL="171450" indent="-171450">
-              <a:buFont typeface="Arial" panose="020B0604020202020204" pitchFamily="34" charset="0"/>
-              <a:buChar char="•"/>
-            </a:pPr>
-            <a:r>
-              <a:rPr lang="en-US" dirty="0" err="1"/>
-              <a:t>XGBoost</a:t>
-            </a:r>
-            <a:r>
-              <a:rPr lang="en-US" dirty="0"/>
-              <a:t> &amp; </a:t>
-            </a:r>
-            <a:r>
-              <a:rPr lang="en-US" dirty="0" err="1"/>
-              <a:t>Catboost</a:t>
-            </a:r>
-            <a:r>
-              <a:rPr lang="en-US" dirty="0"/>
-              <a:t> were trained on both:</a:t>
+              <a:t>→ This approach brought a balance between </a:t>
             </a:r>
           </a:p>
           <a:p>
@@ -1506,8 +1595,12 @@
               <a:buChar char="•"/>
             </a:pPr>
             <a:r>
+              <a:rPr lang="en-US" b="1" dirty="0"/>
+              <a:t>training time</a:t>
+            </a:r>
+            <a:r>
               <a:rPr lang="en-US" dirty="0"/>
-              <a:t>The full reduced set,</a:t>
+              <a:t> </a:t>
             </a:r>
           </a:p>
           <a:p>
@@ -1517,42 +1610,16 @@
             </a:pPr>
             <a:r>
               <a:rPr lang="en-US" dirty="0"/>
-              <a:t>and the top 30 features only.</a:t>
-            </a:r>
-          </a:p>
-          <a:p>
-            <a:pPr marL="171450" indent="-171450">
-              <a:buFont typeface="Arial" panose="020B0604020202020204" pitchFamily="34" charset="0"/>
-              <a:buChar char="•"/>
-            </a:pPr>
-            <a:endParaRPr lang="en-US" dirty="0"/>
-          </a:p>
-          <a:p>
-            <a:pPr marL="171450" indent="-171450">
-              <a:buFont typeface="Arial" panose="020B0604020202020204" pitchFamily="34" charset="0"/>
-              <a:buChar char="•"/>
-            </a:pPr>
+              <a:t>and </a:t>
+            </a:r>
+            <a:r>
+              <a:rPr lang="en-US" b="1" dirty="0"/>
+              <a:t>robustness</a:t>
+            </a:r>
             <a:r>
               <a:rPr lang="en-US" dirty="0"/>
-              <a:t>This helped us compare performance and simplicity, </a:t>
-            </a:r>
-          </a:p>
-          <a:p>
-            <a:pPr marL="0" indent="0">
-              <a:buFont typeface="Arial" panose="020B0604020202020204" pitchFamily="34" charset="0"/>
-              <a:buNone/>
-            </a:pPr>
-            <a:r>
-              <a:rPr lang="en-US" dirty="0"/>
-              <a:t>    -&gt; and </a:t>
-            </a:r>
-            <a:r>
-              <a:rPr lang="en-US" b="1" dirty="0"/>
-              <a:t>test if fewer features could still give good results</a:t>
-            </a:r>
-          </a:p>
-          <a:p>
-            <a:endParaRPr lang="en-US" dirty="0"/>
+              <a:t>.</a:t>
+            </a:r>
           </a:p>
         </p:txBody>
       </p:sp>
@@ -1641,7 +1708,7 @@
               <a:buFont typeface="Arial" panose="020B0604020202020204" pitchFamily="34" charset="0"/>
               <a:buNone/>
             </a:pPr>
-            <a:endParaRPr lang="fr-BE" b="1" dirty="0"/>
+            <a:endParaRPr lang="en-US" b="1" noProof="0" dirty="0"/>
           </a:p>
           <a:p>
             <a:pPr marL="0" marR="0" lvl="0" indent="0" algn="l" defTabSz="914400" rtl="0" eaLnBrk="1" fontAlgn="auto" latinLnBrk="0" hangingPunct="1">
@@ -1662,163 +1729,464 @@
               <a:defRPr/>
             </a:pPr>
             <a:r>
-              <a:rPr lang="fr-BE" b="1" dirty="0"/>
-              <a:t>Best Model</a:t>
-            </a:r>
-            <a:r>
-              <a:rPr lang="fr-BE" dirty="0"/>
-              <a:t>:</a:t>
+              <a:rPr lang="en-US" b="1" noProof="0" dirty="0"/>
+              <a:t>Our Best Model is</a:t>
             </a:r>
             <a:br>
-              <a:rPr lang="fr-BE" dirty="0"/>
+              <a:rPr lang="en-US" noProof="0" dirty="0"/>
             </a:br>
             <a:r>
-              <a:rPr lang="fr-BE" dirty="0" err="1"/>
+              <a:rPr lang="en-US" noProof="0" dirty="0"/>
+              <a:t>-&gt; </a:t>
+            </a:r>
+            <a:r>
+              <a:rPr lang="en-US" b="1" noProof="0" dirty="0" err="1"/>
               <a:t>CatBoost</a:t>
             </a:r>
             <a:r>
-              <a:rPr lang="fr-BE" dirty="0"/>
-              <a:t> + </a:t>
-            </a:r>
-            <a:r>
-              <a:rPr lang="fr-BE" dirty="0" err="1"/>
+              <a:rPr lang="en-US" noProof="0" dirty="0"/>
+              <a:t> combined with </a:t>
+            </a:r>
+            <a:r>
+              <a:rPr lang="en-US" noProof="0" dirty="0" err="1"/>
               <a:t>Optuna</a:t>
             </a:r>
-            <a:r>
-              <a:rPr lang="fr-BE" dirty="0"/>
-              <a:t> + Post-Split Evaluation </a:t>
-            </a:r>
-            <a:r>
-              <a:rPr lang="fr-BE" dirty="0" err="1"/>
-              <a:t>reaches</a:t>
-            </a:r>
-            <a:r>
-              <a:rPr lang="fr-BE" dirty="0"/>
-              <a:t> </a:t>
-            </a:r>
-            <a:r>
-              <a:rPr lang="fr-BE" b="1" dirty="0"/>
-              <a:t>0.81 R²_test &amp; 0,92 R2_test </a:t>
-            </a:r>
-            <a:r>
-              <a:rPr lang="fr-BE" dirty="0" err="1"/>
-              <a:t>with</a:t>
-            </a:r>
-            <a:r>
-              <a:rPr lang="fr-BE" dirty="0"/>
-              <a:t> </a:t>
-            </a:r>
-            <a:r>
-              <a:rPr lang="fr-BE" b="1" dirty="0" err="1"/>
-              <a:t>moderate</a:t>
-            </a:r>
-            <a:r>
-              <a:rPr lang="fr-BE" b="1" dirty="0"/>
-              <a:t> </a:t>
-            </a:r>
-            <a:r>
-              <a:rPr lang="fr-BE" b="1" dirty="0" err="1"/>
-              <a:t>overfitting</a:t>
-            </a:r>
-            <a:r>
-              <a:rPr lang="fr-BE" dirty="0"/>
-              <a:t>.</a:t>
-            </a:r>
-            <a:br>
-              <a:rPr lang="fr-BE" dirty="0"/>
-            </a:br>
-            <a:r>
-              <a:rPr lang="fr-BE" i="1" dirty="0"/>
-              <a:t>(Post-split = re-</a:t>
-            </a:r>
-            <a:r>
-              <a:rPr lang="fr-BE" i="1" dirty="0" err="1"/>
-              <a:t>evaluation</a:t>
-            </a:r>
-            <a:r>
-              <a:rPr lang="fr-BE" i="1" dirty="0"/>
-              <a:t> </a:t>
-            </a:r>
-            <a:r>
-              <a:rPr lang="fr-BE" i="1" dirty="0" err="1"/>
-              <a:t>after</a:t>
-            </a:r>
-            <a:r>
-              <a:rPr lang="fr-BE" i="1" dirty="0"/>
-              <a:t> tuning, on </a:t>
-            </a:r>
-            <a:r>
-              <a:rPr lang="fr-BE" i="1" dirty="0" err="1"/>
-              <a:t>fresh</a:t>
-            </a:r>
-            <a:r>
-              <a:rPr lang="fr-BE" i="1" dirty="0"/>
-              <a:t> data)</a:t>
-            </a:r>
-          </a:p>
-          <a:p>
-            <a:pPr marL="171450" indent="-171450">
+            <a:endParaRPr lang="en-US" noProof="0" dirty="0"/>
+          </a:p>
+          <a:p>
+            <a:pPr marL="171450" marR="0" lvl="0" indent="-171450" algn="l" defTabSz="914400" rtl="0" eaLnBrk="1" fontAlgn="auto" latinLnBrk="0" hangingPunct="1">
+              <a:lnSpc>
+                <a:spcPct val="100000"/>
+              </a:lnSpc>
+              <a:spcBef>
+                <a:spcPts val="0"/>
+              </a:spcBef>
+              <a:spcAft>
+                <a:spcPts val="0"/>
+              </a:spcAft>
+              <a:buClrTx/>
+              <a:buSzTx/>
               <a:buFont typeface="Wingdings" panose="05000000000000000000" pitchFamily="2" charset="2"/>
               <a:buChar char="è"/>
+              <a:tabLst/>
+              <a:defRPr/>
             </a:pPr>
             <a:r>
-              <a:rPr lang="fr-BE" dirty="0"/>
-              <a:t>good train performance, </a:t>
-            </a:r>
-          </a:p>
-          <a:p>
-            <a:pPr marL="628650" lvl="1" indent="-171450">
+              <a:rPr lang="en-US" noProof="0" dirty="0"/>
+              <a:t>The model reached </a:t>
+            </a:r>
+          </a:p>
+          <a:p>
+            <a:pPr marL="628650" marR="0" lvl="1" indent="-171450" algn="l" defTabSz="914400" rtl="0" eaLnBrk="1" fontAlgn="auto" latinLnBrk="0" hangingPunct="1">
+              <a:lnSpc>
+                <a:spcPct val="100000"/>
+              </a:lnSpc>
+              <a:spcBef>
+                <a:spcPts val="0"/>
+              </a:spcBef>
+              <a:spcAft>
+                <a:spcPts val="0"/>
+              </a:spcAft>
+              <a:buClrTx/>
+              <a:buSzTx/>
               <a:buFont typeface="Wingdings" panose="05000000000000000000" pitchFamily="2" charset="2"/>
               <a:buChar char="è"/>
+              <a:tabLst/>
+              <a:defRPr/>
             </a:pPr>
             <a:r>
-              <a:rPr lang="fr-BE" dirty="0" err="1"/>
-              <a:t>slightly</a:t>
-            </a:r>
-            <a:r>
-              <a:rPr lang="fr-BE" dirty="0"/>
-              <a:t> </a:t>
-            </a:r>
-            <a:r>
-              <a:rPr lang="fr-BE" dirty="0" err="1"/>
-              <a:t>worse</a:t>
-            </a:r>
-            <a:r>
-              <a:rPr lang="fr-BE" dirty="0"/>
-              <a:t> on test </a:t>
-            </a:r>
-          </a:p>
-          <a:p>
-            <a:pPr marL="171450" indent="-171450">
+              <a:rPr lang="en-US" noProof="0" dirty="0"/>
+              <a:t>a </a:t>
+            </a:r>
+            <a:r>
+              <a:rPr lang="en-US" b="1" noProof="0" dirty="0"/>
+              <a:t>train coefficient of determination R2</a:t>
+            </a:r>
+            <a:r>
+              <a:rPr lang="en-US" noProof="0" dirty="0"/>
+              <a:t>  of 0,92 (</a:t>
+            </a:r>
+            <a:r>
+              <a:rPr lang="en-US" b="1" noProof="0" dirty="0"/>
+              <a:t>good train </a:t>
+            </a:r>
+            <a:r>
+              <a:rPr lang="en-US" noProof="0" dirty="0"/>
+              <a:t>performance)</a:t>
+            </a:r>
+          </a:p>
+          <a:p>
+            <a:pPr marL="628650" marR="0" lvl="1" indent="-171450" algn="l" defTabSz="914400" rtl="0" eaLnBrk="1" fontAlgn="auto" latinLnBrk="0" hangingPunct="1">
+              <a:lnSpc>
+                <a:spcPct val="100000"/>
+              </a:lnSpc>
+              <a:spcBef>
+                <a:spcPts val="0"/>
+              </a:spcBef>
+              <a:spcAft>
+                <a:spcPts val="0"/>
+              </a:spcAft>
+              <a:buClrTx/>
+              <a:buSzTx/>
               <a:buFont typeface="Wingdings" panose="05000000000000000000" pitchFamily="2" charset="2"/>
               <a:buChar char="è"/>
+              <a:tabLst/>
+              <a:defRPr/>
             </a:pPr>
             <a:r>
-              <a:rPr lang="en-US" dirty="0"/>
-              <a:t>The model captures useful patterns </a:t>
-            </a:r>
-          </a:p>
-          <a:p>
-            <a:pPr marL="628650" lvl="1" indent="-171450">
+              <a:rPr lang="en-US" noProof="0" dirty="0"/>
+              <a:t>the </a:t>
+            </a:r>
+            <a:r>
+              <a:rPr lang="en-US" b="1" noProof="0" dirty="0"/>
+              <a:t>test</a:t>
+            </a:r>
+            <a:r>
+              <a:rPr lang="en-US" noProof="0" dirty="0"/>
+              <a:t> </a:t>
+            </a:r>
+            <a:r>
+              <a:rPr lang="en-US" b="1" noProof="0" dirty="0"/>
+              <a:t>coefficient of determination </a:t>
+            </a:r>
+            <a:r>
+              <a:rPr lang="en-US" b="0" noProof="0" dirty="0"/>
+              <a:t>was</a:t>
+            </a:r>
+            <a:r>
+              <a:rPr lang="en-US" b="1" noProof="0" dirty="0"/>
+              <a:t> bit lower, </a:t>
+            </a:r>
+            <a:r>
+              <a:rPr lang="en-US" noProof="0" dirty="0"/>
+              <a:t> 0,81: </a:t>
+            </a:r>
+          </a:p>
+          <a:p>
+            <a:pPr marL="628650" marR="0" lvl="1" indent="-171450" algn="l" defTabSz="914400" rtl="0" eaLnBrk="1" fontAlgn="auto" latinLnBrk="0" hangingPunct="1">
+              <a:lnSpc>
+                <a:spcPct val="100000"/>
+              </a:lnSpc>
+              <a:spcBef>
+                <a:spcPts val="0"/>
+              </a:spcBef>
+              <a:spcAft>
+                <a:spcPts val="0"/>
+              </a:spcAft>
+              <a:buClrTx/>
+              <a:buSzTx/>
               <a:buFont typeface="Wingdings" panose="05000000000000000000" pitchFamily="2" charset="2"/>
               <a:buChar char="è"/>
+              <a:tabLst/>
+              <a:defRPr/>
             </a:pPr>
             <a:r>
+              <a:rPr lang="en-US" noProof="0" dirty="0"/>
+              <a:t>that means the model </a:t>
+            </a:r>
+            <a:r>
+              <a:rPr lang="en-US" b="1" noProof="0" dirty="0"/>
+              <a:t>performs slightly worse on test</a:t>
+            </a:r>
+            <a:r>
+              <a:rPr lang="en-US" noProof="0" dirty="0"/>
+              <a:t>, on unseen data</a:t>
+            </a:r>
+          </a:p>
+          <a:p>
+            <a:pPr marL="628650" marR="0" lvl="1" indent="-171450" algn="l" defTabSz="914400" rtl="0" eaLnBrk="1" fontAlgn="auto" latinLnBrk="0" hangingPunct="1">
+              <a:lnSpc>
+                <a:spcPct val="100000"/>
+              </a:lnSpc>
+              <a:spcBef>
+                <a:spcPts val="0"/>
+              </a:spcBef>
+              <a:spcAft>
+                <a:spcPts val="0"/>
+              </a:spcAft>
+              <a:buClrTx/>
+              <a:buSzTx/>
+              <a:buFont typeface="Wingdings" panose="05000000000000000000" pitchFamily="2" charset="2"/>
+              <a:buChar char="è"/>
+              <a:tabLst/>
+              <a:defRPr/>
+            </a:pPr>
+            <a:r>
+              <a:rPr lang="en-US" noProof="0" dirty="0"/>
+              <a:t>(mean absolute error gab 18k)</a:t>
+            </a:r>
+          </a:p>
+          <a:p>
+            <a:pPr marL="628650" marR="0" lvl="1" indent="-171450" algn="l" defTabSz="914400" rtl="0" eaLnBrk="1" fontAlgn="auto" latinLnBrk="0" hangingPunct="1">
+              <a:lnSpc>
+                <a:spcPct val="100000"/>
+              </a:lnSpc>
+              <a:spcBef>
+                <a:spcPts val="0"/>
+              </a:spcBef>
+              <a:spcAft>
+                <a:spcPts val="0"/>
+              </a:spcAft>
+              <a:buClrTx/>
+              <a:buSzTx/>
+              <a:buFont typeface="Wingdings" panose="05000000000000000000" pitchFamily="2" charset="2"/>
+              <a:buChar char="è"/>
+              <a:tabLst/>
+              <a:defRPr/>
+            </a:pPr>
+            <a:r>
+              <a:rPr lang="en-US" noProof="0" dirty="0"/>
+              <a:t>hyperparameter tuning, highly advised on GPU, our </a:t>
+            </a:r>
+            <a:r>
+              <a:rPr lang="en-US" b="1" noProof="0" dirty="0"/>
+              <a:t>R2 gap became</a:t>
+            </a:r>
+            <a:r>
+              <a:rPr lang="en-US" noProof="0" dirty="0"/>
+              <a:t> 0,1 </a:t>
+            </a:r>
+          </a:p>
+          <a:p>
+            <a:pPr marL="628650" marR="0" lvl="1" indent="-171450" algn="l" defTabSz="914400" rtl="0" eaLnBrk="1" fontAlgn="auto" latinLnBrk="0" hangingPunct="1">
+              <a:lnSpc>
+                <a:spcPct val="100000"/>
+              </a:lnSpc>
+              <a:spcBef>
+                <a:spcPts val="0"/>
+              </a:spcBef>
+              <a:spcAft>
+                <a:spcPts val="0"/>
+              </a:spcAft>
+              <a:buClrTx/>
+              <a:buSzTx/>
+              <a:buFont typeface="Wingdings" panose="05000000000000000000" pitchFamily="2" charset="2"/>
+              <a:buChar char="è"/>
+              <a:tabLst/>
+              <a:defRPr/>
+            </a:pPr>
+            <a:r>
+              <a:rPr lang="en-US" noProof="0" dirty="0"/>
+              <a:t> meaning </a:t>
+            </a:r>
+            <a:r>
+              <a:rPr lang="en-US" b="1" noProof="0" dirty="0"/>
+              <a:t>the slight overfitting</a:t>
+            </a:r>
+            <a:r>
+              <a:rPr lang="en-US" noProof="0" dirty="0"/>
+              <a:t>, </a:t>
+            </a:r>
+            <a:r>
+              <a:rPr lang="en-US" b="1" noProof="0" dirty="0"/>
+              <a:t>remained acceptable. </a:t>
+            </a:r>
+          </a:p>
+          <a:p>
+            <a:pPr marL="0" marR="0" lvl="0" indent="0" algn="l" defTabSz="914400" rtl="0" eaLnBrk="1" fontAlgn="auto" latinLnBrk="0" hangingPunct="1">
+              <a:lnSpc>
+                <a:spcPct val="100000"/>
+              </a:lnSpc>
+              <a:spcBef>
+                <a:spcPts val="0"/>
+              </a:spcBef>
+              <a:spcAft>
+                <a:spcPts val="0"/>
+              </a:spcAft>
+              <a:buClrTx/>
+              <a:buSzTx/>
+              <a:buFontTx/>
+              <a:buNone/>
+              <a:tabLst/>
+              <a:defRPr/>
+            </a:pPr>
+            <a:r>
+              <a:rPr lang="en-US" noProof="0" dirty="0"/>
+              <a:t> </a:t>
+            </a:r>
+          </a:p>
+          <a:p>
+            <a:pPr marL="0" marR="0" lvl="0" indent="0" algn="l" defTabSz="914400" rtl="0" eaLnBrk="1" fontAlgn="auto" latinLnBrk="0" hangingPunct="1">
+              <a:lnSpc>
+                <a:spcPct val="100000"/>
+              </a:lnSpc>
+              <a:spcBef>
+                <a:spcPts val="0"/>
+              </a:spcBef>
+              <a:spcAft>
+                <a:spcPts val="0"/>
+              </a:spcAft>
+              <a:buClrTx/>
+              <a:buSzTx/>
+              <a:buFontTx/>
+              <a:buNone/>
+              <a:tabLst/>
+              <a:defRPr/>
+            </a:pPr>
+            <a:endParaRPr lang="en-US" noProof="0" dirty="0"/>
+          </a:p>
+          <a:p>
+            <a:pPr marL="0" marR="0" lvl="0" indent="0" algn="l" defTabSz="914400" rtl="0" eaLnBrk="1" fontAlgn="auto" latinLnBrk="0" hangingPunct="1">
+              <a:lnSpc>
+                <a:spcPct val="100000"/>
+              </a:lnSpc>
+              <a:spcBef>
+                <a:spcPts val="0"/>
+              </a:spcBef>
+              <a:spcAft>
+                <a:spcPts val="0"/>
+              </a:spcAft>
+              <a:buClrTx/>
+              <a:buSzTx/>
+              <a:buFontTx/>
+              <a:buNone/>
+              <a:tabLst/>
+              <a:defRPr/>
+            </a:pPr>
+            <a:r>
+              <a:rPr lang="en-US" noProof="0" dirty="0"/>
+              <a:t>We noticed : </a:t>
+            </a:r>
+          </a:p>
+          <a:p>
+            <a:pPr marL="171450" marR="0" lvl="0" indent="-171450" algn="l" defTabSz="914400" rtl="0" eaLnBrk="1" fontAlgn="auto" latinLnBrk="0" hangingPunct="1">
+              <a:lnSpc>
+                <a:spcPct val="100000"/>
+              </a:lnSpc>
+              <a:spcBef>
+                <a:spcPts val="0"/>
+              </a:spcBef>
+              <a:spcAft>
+                <a:spcPts val="0"/>
+              </a:spcAft>
+              <a:buClrTx/>
+              <a:buSzTx/>
+              <a:buFont typeface="Wingdings" panose="05000000000000000000" pitchFamily="2" charset="2"/>
+              <a:buChar char="è"/>
+              <a:tabLst/>
+              <a:defRPr/>
+            </a:pPr>
+            <a:r>
+              <a:rPr lang="en-US" b="1" dirty="0" err="1"/>
+              <a:t>CatBoost</a:t>
+            </a:r>
+            <a:r>
               <a:rPr lang="en-US" dirty="0"/>
-              <a:t>but also some noise, leading to </a:t>
+              <a:t> was especially good when data includes </a:t>
             </a:r>
             <a:r>
               <a:rPr lang="en-US" b="1" dirty="0"/>
-              <a:t>moderate overfitting</a:t>
-            </a:r>
+              <a:t>categorical features</a:t>
+            </a:r>
+          </a:p>
+          <a:p>
+            <a:pPr marL="628650" marR="0" lvl="1" indent="-171450" algn="l" defTabSz="914400" rtl="0" eaLnBrk="1" fontAlgn="auto" latinLnBrk="0" hangingPunct="1">
+              <a:lnSpc>
+                <a:spcPct val="100000"/>
+              </a:lnSpc>
+              <a:spcBef>
+                <a:spcPts val="0"/>
+              </a:spcBef>
+              <a:spcAft>
+                <a:spcPts val="0"/>
+              </a:spcAft>
+              <a:buClrTx/>
+              <a:buSzTx/>
+              <a:buFont typeface="Wingdings" panose="05000000000000000000" pitchFamily="2" charset="2"/>
+              <a:buChar char="è"/>
+              <a:tabLst/>
+              <a:defRPr/>
+            </a:pPr>
             <a:r>
               <a:rPr lang="en-US" dirty="0"/>
-              <a:t>. (R2 gap is 0.1)</a:t>
-            </a:r>
-            <a:endParaRPr lang="fr-BE" dirty="0"/>
-          </a:p>
-          <a:p>
-            <a:endParaRPr lang="fr-BE" b="1" dirty="0"/>
+              <a:t>Like provinces, </a:t>
+            </a:r>
+          </a:p>
+          <a:p>
+            <a:pPr marL="628650" marR="0" lvl="1" indent="-171450" algn="l" defTabSz="914400" rtl="0" eaLnBrk="1" fontAlgn="auto" latinLnBrk="0" hangingPunct="1">
+              <a:lnSpc>
+                <a:spcPct val="100000"/>
+              </a:lnSpc>
+              <a:spcBef>
+                <a:spcPts val="0"/>
+              </a:spcBef>
+              <a:spcAft>
+                <a:spcPts val="0"/>
+              </a:spcAft>
+              <a:buClrTx/>
+              <a:buSzTx/>
+              <a:buFont typeface="Wingdings" panose="05000000000000000000" pitchFamily="2" charset="2"/>
+              <a:buChar char="è"/>
+              <a:tabLst/>
+              <a:defRPr/>
+            </a:pPr>
+            <a:r>
+              <a:rPr lang="en-US" dirty="0"/>
+              <a:t>houses, apartment</a:t>
+            </a:r>
+          </a:p>
+          <a:p>
+            <a:pPr marL="628650" marR="0" lvl="1" indent="-171450" algn="l" defTabSz="914400" rtl="0" eaLnBrk="1" fontAlgn="auto" latinLnBrk="0" hangingPunct="1">
+              <a:lnSpc>
+                <a:spcPct val="100000"/>
+              </a:lnSpc>
+              <a:spcBef>
+                <a:spcPts val="0"/>
+              </a:spcBef>
+              <a:spcAft>
+                <a:spcPts val="0"/>
+              </a:spcAft>
+              <a:buClrTx/>
+              <a:buSzTx/>
+              <a:buFont typeface="Wingdings" panose="05000000000000000000" pitchFamily="2" charset="2"/>
+              <a:buChar char="è"/>
+              <a:tabLst/>
+              <a:defRPr/>
+            </a:pPr>
+            <a:r>
+              <a:rPr lang="en-US" dirty="0"/>
+              <a:t>and cities</a:t>
+            </a:r>
+          </a:p>
+          <a:p>
+            <a:pPr marL="628650" marR="0" lvl="1" indent="-171450" algn="l" defTabSz="914400" rtl="0" eaLnBrk="1" fontAlgn="auto" latinLnBrk="0" hangingPunct="1">
+              <a:lnSpc>
+                <a:spcPct val="100000"/>
+              </a:lnSpc>
+              <a:spcBef>
+                <a:spcPts val="0"/>
+              </a:spcBef>
+              <a:spcAft>
+                <a:spcPts val="0"/>
+              </a:spcAft>
+              <a:buClrTx/>
+              <a:buSzTx/>
+              <a:buFont typeface="Wingdings" panose="05000000000000000000" pitchFamily="2" charset="2"/>
+              <a:buChar char="è"/>
+              <a:tabLst/>
+              <a:defRPr/>
+            </a:pPr>
+            <a:endParaRPr lang="en-US" dirty="0"/>
+          </a:p>
+          <a:p>
+            <a:pPr marL="628650" marR="0" lvl="1" indent="-171450" algn="l" defTabSz="914400" rtl="0" eaLnBrk="1" fontAlgn="auto" latinLnBrk="0" hangingPunct="1">
+              <a:lnSpc>
+                <a:spcPct val="100000"/>
+              </a:lnSpc>
+              <a:spcBef>
+                <a:spcPts val="0"/>
+              </a:spcBef>
+              <a:spcAft>
+                <a:spcPts val="0"/>
+              </a:spcAft>
+              <a:buClrTx/>
+              <a:buSzTx/>
+              <a:buFont typeface="Wingdings" panose="05000000000000000000" pitchFamily="2" charset="2"/>
+              <a:buChar char="è"/>
+              <a:tabLst/>
+              <a:defRPr/>
+            </a:pPr>
+            <a:endParaRPr lang="en-US" dirty="0"/>
           </a:p>
           <a:p>
             <a:pPr marL="171450" indent="-171450">
@@ -1826,65 +2194,50 @@
               <a:buChar char="•"/>
             </a:pPr>
             <a:r>
-              <a:rPr lang="fr-BE" b="1" dirty="0" err="1"/>
+              <a:rPr lang="en-US" b="1" noProof="0" dirty="0" err="1"/>
               <a:t>XGBoost</a:t>
             </a:r>
             <a:r>
-              <a:rPr lang="fr-BE" dirty="0"/>
+              <a:rPr lang="en-US" noProof="0" dirty="0"/>
+              <a:t> benefits from </a:t>
+            </a:r>
+            <a:r>
+              <a:rPr lang="en-US" b="1" i="1" noProof="0" dirty="0"/>
+              <a:t>early stopping</a:t>
+            </a:r>
+            <a:r>
+              <a:rPr lang="en-US" b="1" noProof="0" dirty="0"/>
               <a:t> </a:t>
             </a:r>
-            <a:r>
-              <a:rPr lang="fr-BE" dirty="0" err="1"/>
-              <a:t>benefits</a:t>
-            </a:r>
-            <a:r>
-              <a:rPr lang="fr-BE" dirty="0"/>
-              <a:t> </a:t>
-            </a:r>
-            <a:r>
-              <a:rPr lang="fr-BE" dirty="0" err="1"/>
-              <a:t>from</a:t>
-            </a:r>
-            <a:r>
-              <a:rPr lang="fr-BE" dirty="0"/>
-              <a:t> </a:t>
-            </a:r>
-            <a:r>
-              <a:rPr lang="fr-BE" b="1" i="1" dirty="0" err="1"/>
-              <a:t>early</a:t>
-            </a:r>
-            <a:r>
-              <a:rPr lang="fr-BE" b="1" i="1" dirty="0"/>
-              <a:t> </a:t>
-            </a:r>
-            <a:r>
-              <a:rPr lang="fr-BE" b="1" i="1" dirty="0" err="1"/>
-              <a:t>stopping</a:t>
-            </a:r>
-            <a:r>
-              <a:rPr lang="fr-BE" b="1" dirty="0"/>
-              <a:t> </a:t>
-            </a:r>
-            <a:r>
-              <a:rPr lang="fr-BE" dirty="0"/>
-              <a:t>(stops training </a:t>
-            </a:r>
-            <a:r>
-              <a:rPr lang="fr-BE" dirty="0" err="1"/>
-              <a:t>when</a:t>
-            </a:r>
-            <a:r>
-              <a:rPr lang="fr-BE" dirty="0"/>
-              <a:t> the model stops </a:t>
-            </a:r>
-            <a:r>
-              <a:rPr lang="fr-BE" dirty="0" err="1"/>
-              <a:t>improving</a:t>
-            </a:r>
-            <a:r>
-              <a:rPr lang="fr-BE" dirty="0"/>
-              <a:t>).</a:t>
-            </a:r>
+          </a:p>
+          <a:p>
+            <a:pPr marL="0" indent="0">
+              <a:buFont typeface="Arial" panose="020B0604020202020204" pitchFamily="34" charset="0"/>
+              <a:buNone/>
+            </a:pPr>
+            <a:r>
+              <a:rPr lang="en-US" b="1" noProof="0" dirty="0"/>
+              <a:t>          -&gt; It stops training </a:t>
+            </a:r>
+            <a:r>
+              <a:rPr lang="en-US" noProof="0" dirty="0"/>
+              <a:t>when the </a:t>
+            </a:r>
+            <a:r>
+              <a:rPr lang="en-US" b="1" noProof="0" dirty="0"/>
+              <a:t>model stops improving</a:t>
+            </a:r>
+            <a:r>
+              <a:rPr lang="en-US" noProof="0" dirty="0"/>
+              <a:t>.</a:t>
+            </a:r>
+          </a:p>
+          <a:p>
+            <a:pPr marL="0" indent="0">
+              <a:buFont typeface="Arial" panose="020B0604020202020204" pitchFamily="34" charset="0"/>
+              <a:buNone/>
+            </a:pPr>
+            <a:endParaRPr lang="en-US" noProof="0" dirty="0"/>
           </a:p>
           <a:p>
             <a:pPr marL="171450" indent="-171450">
@@ -1892,52 +2245,24 @@
               <a:buChar char="•"/>
             </a:pPr>
             <a:r>
-              <a:rPr lang="fr-BE" b="1" dirty="0" err="1"/>
-              <a:t>Random</a:t>
-            </a:r>
-            <a:r>
-              <a:rPr lang="fr-BE" b="1" dirty="0"/>
-              <a:t> Forest</a:t>
-            </a:r>
-            <a:r>
-              <a:rPr lang="fr-BE" dirty="0"/>
-              <a:t> shows </a:t>
-            </a:r>
-            <a:r>
-              <a:rPr lang="fr-BE" b="1" i="1" dirty="0" err="1"/>
-              <a:t>strong</a:t>
-            </a:r>
-            <a:r>
-              <a:rPr lang="fr-BE" b="1" i="1" dirty="0"/>
+              <a:rPr lang="en-US" b="1" noProof="0" dirty="0"/>
+              <a:t>Random Forest</a:t>
+            </a:r>
+            <a:r>
+              <a:rPr lang="en-US" noProof="0" dirty="0"/>
+              <a:t> provided </a:t>
+            </a:r>
+            <a:r>
+              <a:rPr lang="en-US" b="1" i="1" noProof="0" dirty="0"/>
+              <a:t>strong overfitting</a:t>
+            </a:r>
+            <a:r>
+              <a:rPr lang="en-US" b="1" noProof="0" dirty="0"/>
               <a:t> </a:t>
             </a:r>
             <a:r>
-              <a:rPr lang="fr-BE" b="1" i="1" dirty="0" err="1"/>
-              <a:t>overfitting</a:t>
-            </a:r>
-            <a:r>
-              <a:rPr lang="fr-BE" b="1" dirty="0"/>
-              <a:t> </a:t>
-            </a:r>
-            <a:r>
-              <a:rPr lang="fr-BE" dirty="0"/>
-              <a:t>(</a:t>
-            </a:r>
-            <a:r>
-              <a:rPr lang="fr-BE" dirty="0" err="1"/>
-              <a:t>perfect</a:t>
-            </a:r>
-            <a:r>
-              <a:rPr lang="fr-BE" dirty="0"/>
-              <a:t> on train, </a:t>
-            </a:r>
-            <a:r>
-              <a:rPr lang="fr-BE" dirty="0" err="1"/>
-              <a:t>poor</a:t>
-            </a:r>
-            <a:r>
-              <a:rPr lang="fr-BE" dirty="0"/>
-              <a:t> on test).</a:t>
+              <a:rPr lang="en-US" noProof="0" dirty="0"/>
+              <a:t>(perfect on train, poor on test).</a:t>
             </a:r>
           </a:p>
           <a:p>
@@ -1946,62 +2271,264 @@
               <a:buChar char="•"/>
             </a:pPr>
             <a:r>
-              <a:rPr lang="fr-BE" b="1" dirty="0" err="1"/>
-              <a:t>Linear</a:t>
-            </a:r>
-            <a:r>
-              <a:rPr lang="fr-BE" b="1" dirty="0"/>
+              <a:rPr lang="en-US" b="1" noProof="0" dirty="0"/>
+              <a:t>Linear models</a:t>
+            </a:r>
+            <a:r>
+              <a:rPr lang="en-US" noProof="0" dirty="0"/>
+              <a:t> underfit → the model is too simple for this task.</a:t>
+            </a:r>
+          </a:p>
+          <a:p>
+            <a:pPr marL="171450" indent="-171450">
+              <a:buFont typeface="Arial" panose="020B0604020202020204" pitchFamily="34" charset="0"/>
+              <a:buChar char="•"/>
+            </a:pPr>
+            <a:r>
+              <a:rPr lang="en-US" b="1" dirty="0"/>
+              <a:t>Polynomial Regression </a:t>
+            </a:r>
+            <a:r>
+              <a:rPr lang="en-US" dirty="0"/>
+              <a:t>also underperforms</a:t>
+            </a:r>
+          </a:p>
+          <a:p>
+            <a:pPr marL="0" indent="0">
+              <a:buFont typeface="Arial" panose="020B0604020202020204" pitchFamily="34" charset="0"/>
+              <a:buNone/>
+            </a:pPr>
+            <a:r>
+              <a:rPr lang="en-US" dirty="0"/>
+              <a:t>      -&gt; the model is </a:t>
+            </a:r>
+            <a:r>
+              <a:rPr lang="en-US" b="1" dirty="0"/>
+              <a:t>too limited, </a:t>
+            </a:r>
+            <a:r>
+              <a:rPr lang="en-US" dirty="0"/>
+              <a:t>to capture </a:t>
+            </a:r>
+            <a:r>
+              <a:rPr lang="en-US" b="1" dirty="0"/>
+              <a:t>non-linear structure, </a:t>
+            </a:r>
+            <a:r>
+              <a:rPr lang="en-US" b="0" dirty="0"/>
+              <a:t>o</a:t>
+            </a:r>
+            <a:r>
+              <a:rPr lang="en-US" dirty="0"/>
+              <a:t>f housing prices</a:t>
+            </a:r>
+            <a:endParaRPr lang="en-US" noProof="0" dirty="0"/>
+          </a:p>
+          <a:p>
+            <a:endParaRPr lang="en-US" i="1" dirty="0"/>
+          </a:p>
+          <a:p>
+            <a:endParaRPr lang="en-US" i="1" dirty="0"/>
+          </a:p>
+          <a:p>
+            <a:pPr marL="0" marR="0" lvl="0" indent="0" algn="l" defTabSz="914400" rtl="0" eaLnBrk="1" fontAlgn="auto" latinLnBrk="0" hangingPunct="1">
+              <a:lnSpc>
+                <a:spcPct val="100000"/>
+              </a:lnSpc>
+              <a:spcBef>
+                <a:spcPts val="0"/>
+              </a:spcBef>
+              <a:spcAft>
+                <a:spcPts val="0"/>
+              </a:spcAft>
+              <a:buClrTx/>
+              <a:buSzTx/>
+              <a:buFontTx/>
+              <a:buNone/>
+              <a:tabLst/>
+              <a:defRPr/>
+            </a:pPr>
+            <a:r>
+              <a:rPr lang="en-US" i="1" dirty="0"/>
+              <a:t>========================================</a:t>
+            </a:r>
+          </a:p>
+          <a:p>
+            <a:r>
+              <a:rPr lang="en-US" i="1" dirty="0"/>
+              <a:t>========================================</a:t>
+            </a:r>
+          </a:p>
+          <a:p>
+            <a:endParaRPr lang="en-US" i="1" dirty="0"/>
+          </a:p>
+          <a:p>
+            <a:pPr marL="0" marR="0" lvl="0" indent="0" algn="l" defTabSz="914400" rtl="0" eaLnBrk="1" fontAlgn="auto" latinLnBrk="0" hangingPunct="1">
+              <a:lnSpc>
+                <a:spcPct val="100000"/>
+              </a:lnSpc>
+              <a:spcBef>
+                <a:spcPts val="0"/>
+              </a:spcBef>
+              <a:spcAft>
+                <a:spcPts val="0"/>
+              </a:spcAft>
+              <a:buClrTx/>
+              <a:buSzTx/>
+              <a:buFontTx/>
+              <a:buNone/>
+              <a:tabLst/>
+              <a:defRPr/>
+            </a:pPr>
+            <a:r>
+              <a:rPr lang="en-US" b="0" noProof="0" dirty="0"/>
+              <a:t>In general, </a:t>
+            </a:r>
+            <a:r>
+              <a:rPr lang="en-US" b="1" noProof="0" dirty="0" err="1"/>
+              <a:t>Optuna</a:t>
+            </a:r>
+            <a:r>
+              <a:rPr lang="en-US" b="1" noProof="0" dirty="0"/>
+              <a:t> Improved Generalization</a:t>
+            </a:r>
+            <a:r>
+              <a:rPr lang="en-US" b="0" noProof="0" dirty="0"/>
               <a:t> </a:t>
             </a:r>
-            <a:r>
-              <a:rPr lang="fr-BE" b="1" dirty="0" err="1"/>
-              <a:t>models</a:t>
-            </a:r>
-            <a:r>
-              <a:rPr lang="fr-BE" dirty="0"/>
-              <a:t> </a:t>
-            </a:r>
-            <a:r>
-              <a:rPr lang="fr-BE" dirty="0" err="1"/>
-              <a:t>underfit</a:t>
-            </a:r>
-            <a:r>
-              <a:rPr lang="fr-BE" dirty="0"/>
-              <a:t> → </a:t>
-            </a:r>
-            <a:r>
-              <a:rPr lang="fr-BE" dirty="0" err="1"/>
-              <a:t>too</a:t>
-            </a:r>
-            <a:r>
-              <a:rPr lang="fr-BE" dirty="0"/>
-              <a:t> simple for </a:t>
-            </a:r>
-            <a:r>
-              <a:rPr lang="fr-BE" dirty="0" err="1"/>
-              <a:t>this</a:t>
-            </a:r>
-            <a:r>
-              <a:rPr lang="fr-BE" dirty="0"/>
-              <a:t> </a:t>
-            </a:r>
-            <a:r>
-              <a:rPr lang="fr-BE" dirty="0" err="1"/>
-              <a:t>task</a:t>
-            </a:r>
-            <a:r>
-              <a:rPr lang="fr-BE" dirty="0"/>
+          </a:p>
+          <a:p>
+            <a:pPr marL="171450" marR="0" lvl="0" indent="-171450" algn="l" defTabSz="914400" rtl="0" eaLnBrk="1" fontAlgn="auto" latinLnBrk="0" hangingPunct="1">
+              <a:lnSpc>
+                <a:spcPct val="100000"/>
+              </a:lnSpc>
+              <a:spcBef>
+                <a:spcPts val="0"/>
+              </a:spcBef>
+              <a:spcAft>
+                <a:spcPts val="0"/>
+              </a:spcAft>
+              <a:buClrTx/>
+              <a:buSzTx/>
+              <a:buFont typeface="Wingdings" panose="05000000000000000000" pitchFamily="2" charset="2"/>
+              <a:buChar char="à"/>
+              <a:tabLst/>
+              <a:defRPr/>
+            </a:pPr>
+            <a:r>
+              <a:rPr lang="en-US" b="0" noProof="0" dirty="0">
+                <a:sym typeface="Wingdings" panose="05000000000000000000" pitchFamily="2" charset="2"/>
+              </a:rPr>
+              <a:t>It uses </a:t>
+            </a:r>
+            <a:r>
+              <a:rPr lang="en-US" b="1" noProof="0" dirty="0"/>
+              <a:t>K-Fold Cross-Validation (as explained previously</a:t>
+            </a:r>
+            <a:r>
+              <a:rPr lang="en-US" b="0" noProof="0" dirty="0"/>
+              <a:t>)</a:t>
+            </a:r>
+          </a:p>
+          <a:p>
+            <a:pPr marL="171450" marR="0" lvl="0" indent="-171450" algn="l" defTabSz="914400" rtl="0" eaLnBrk="1" fontAlgn="auto" latinLnBrk="0" hangingPunct="1">
+              <a:lnSpc>
+                <a:spcPct val="100000"/>
+              </a:lnSpc>
+              <a:spcBef>
+                <a:spcPts val="0"/>
+              </a:spcBef>
+              <a:spcAft>
+                <a:spcPts val="0"/>
+              </a:spcAft>
+              <a:buClrTx/>
+              <a:buSzTx/>
+              <a:buFont typeface="Wingdings" panose="05000000000000000000" pitchFamily="2" charset="2"/>
+              <a:buChar char="à"/>
+              <a:tabLst/>
+              <a:defRPr/>
+            </a:pPr>
+            <a:endParaRPr lang="en-US" noProof="0" dirty="0"/>
+          </a:p>
+          <a:p>
+            <a:pPr marL="0" marR="0" lvl="0" indent="0" algn="l" defTabSz="914400" rtl="0" eaLnBrk="1" fontAlgn="auto" latinLnBrk="0" hangingPunct="1">
+              <a:lnSpc>
+                <a:spcPct val="100000"/>
+              </a:lnSpc>
+              <a:spcBef>
+                <a:spcPts val="0"/>
+              </a:spcBef>
+              <a:spcAft>
+                <a:spcPts val="0"/>
+              </a:spcAft>
+              <a:buClrTx/>
+              <a:buSzTx/>
+              <a:buFontTx/>
+              <a:buNone/>
+              <a:tabLst/>
+              <a:defRPr/>
+            </a:pPr>
+            <a:r>
+              <a:rPr lang="en-US" dirty="0"/>
+              <a:t>And the cherry on top: </a:t>
+            </a:r>
+            <a:r>
+              <a:rPr lang="en-US" b="1" dirty="0" err="1"/>
+              <a:t>Optuna</a:t>
+            </a:r>
+            <a:r>
+              <a:rPr lang="en-US" b="1" dirty="0"/>
+              <a:t> also uses Bayesian Optimization</a:t>
+            </a:r>
+            <a:r>
+              <a:rPr lang="en-US" dirty="0"/>
+              <a:t> (based on Bayes’ Theorem).</a:t>
+            </a:r>
+            <a:br>
+              <a:rPr lang="en-US" dirty="0"/>
+            </a:br>
+            <a:r>
+              <a:rPr lang="en-US" dirty="0"/>
+              <a:t>→ It helps the model make better predictions </a:t>
+            </a:r>
+          </a:p>
+          <a:p>
+            <a:pPr marL="0" marR="0" lvl="0" indent="0" algn="l" defTabSz="914400" rtl="0" eaLnBrk="1" fontAlgn="auto" latinLnBrk="0" hangingPunct="1">
+              <a:lnSpc>
+                <a:spcPct val="100000"/>
+              </a:lnSpc>
+              <a:spcBef>
+                <a:spcPts val="0"/>
+              </a:spcBef>
+              <a:spcAft>
+                <a:spcPts val="0"/>
+              </a:spcAft>
+              <a:buClrTx/>
+              <a:buSzTx/>
+              <a:buFontTx/>
+              <a:buNone/>
+              <a:tabLst/>
+              <a:defRPr/>
+            </a:pPr>
+            <a:r>
+              <a:rPr lang="en-US" dirty="0"/>
+              <a:t>→ by </a:t>
+            </a:r>
+            <a:r>
+              <a:rPr lang="en-US" b="1" dirty="0"/>
+              <a:t>combining prior knowledge with new observations</a:t>
+            </a:r>
+            <a:r>
+              <a:rPr lang="en-US" dirty="0"/>
               <a:t>.</a:t>
             </a:r>
-          </a:p>
-          <a:p>
-            <a:endParaRPr lang="en-US" dirty="0"/>
-          </a:p>
-          <a:p>
-            <a:r>
-              <a:rPr lang="en-US" dirty="0"/>
-              <a:t>----------------------------------------------</a:t>
-            </a:r>
+            <a:endParaRPr lang="en-US" noProof="0" dirty="0"/>
+          </a:p>
+          <a:p>
+            <a:endParaRPr lang="en-US" i="1" dirty="0"/>
+          </a:p>
+          <a:p>
+            <a:endParaRPr lang="en-US" i="1" dirty="0"/>
           </a:p>
           <a:p>
             <a:endParaRPr lang="en-US" i="1" dirty="0"/>
@@ -2196,10 +2723,406 @@
             </a:r>
           </a:p>
           <a:p>
+            <a:pPr marL="171450" indent="-171450">
+              <a:buFont typeface="Arial" panose="020B0604020202020204" pitchFamily="34" charset="0"/>
+              <a:buChar char="•"/>
+            </a:pPr>
+            <a:endParaRPr lang="fr-BE" i="1" dirty="0"/>
+          </a:p>
+          <a:p>
+            <a:pPr marL="171450" marR="0" lvl="0" indent="-171450" algn="l" defTabSz="914400" rtl="0" eaLnBrk="1" fontAlgn="auto" latinLnBrk="0" hangingPunct="1">
+              <a:lnSpc>
+                <a:spcPct val="100000"/>
+              </a:lnSpc>
+              <a:spcBef>
+                <a:spcPts val="0"/>
+              </a:spcBef>
+              <a:spcAft>
+                <a:spcPts val="0"/>
+              </a:spcAft>
+              <a:buClrTx/>
+              <a:buSzTx/>
+              <a:buFont typeface="Wingdings" panose="05000000000000000000" pitchFamily="2" charset="2"/>
+              <a:buChar char="è"/>
+              <a:tabLst/>
+              <a:defRPr/>
+            </a:pPr>
+            <a:r>
+              <a:rPr lang="en-US" b="1" i="1" dirty="0" err="1"/>
+              <a:t>CatBoost</a:t>
+            </a:r>
+            <a:r>
+              <a:rPr lang="en-US" i="1" dirty="0"/>
+              <a:t> is a </a:t>
+            </a:r>
+            <a:r>
+              <a:rPr lang="en-US" b="1" i="1" dirty="0"/>
+              <a:t>gradient boosting</a:t>
+            </a:r>
+            <a:r>
+              <a:rPr lang="en-US" i="1" dirty="0"/>
+              <a:t> algorithm</a:t>
+            </a:r>
+          </a:p>
+          <a:p>
+            <a:pPr marL="171450" marR="0" lvl="0" indent="-171450" algn="l" defTabSz="914400" rtl="0" eaLnBrk="1" fontAlgn="auto" latinLnBrk="0" hangingPunct="1">
+              <a:lnSpc>
+                <a:spcPct val="100000"/>
+              </a:lnSpc>
+              <a:spcBef>
+                <a:spcPts val="0"/>
+              </a:spcBef>
+              <a:spcAft>
+                <a:spcPts val="0"/>
+              </a:spcAft>
+              <a:buClrTx/>
+              <a:buSzTx/>
+              <a:buFont typeface="Wingdings" panose="05000000000000000000" pitchFamily="2" charset="2"/>
+              <a:buChar char="è"/>
+              <a:tabLst/>
+              <a:defRPr/>
+            </a:pPr>
+            <a:r>
+              <a:rPr lang="en-US" b="1" i="1" dirty="0"/>
+              <a:t>The models are trained in sequence</a:t>
+            </a:r>
+            <a:r>
+              <a:rPr lang="en-US" i="1" dirty="0"/>
+              <a:t>, each one correcting the errors of the previous.</a:t>
+            </a:r>
+          </a:p>
+          <a:p>
+            <a:pPr marL="171450" indent="-171450">
+              <a:buFont typeface="Arial" panose="020B0604020202020204" pitchFamily="34" charset="0"/>
+              <a:buChar char="•"/>
+            </a:pPr>
+            <a:endParaRPr lang="fr-BE" i="1" dirty="0"/>
+          </a:p>
+          <a:p>
             <a:endParaRPr lang="en-US" dirty="0"/>
           </a:p>
           <a:p>
-            <a:endParaRPr lang="en-US" dirty="0"/>
+            <a:r>
+              <a:rPr lang="en-US" b="1" dirty="0"/>
+              <a:t>--------------------------</a:t>
+            </a:r>
+          </a:p>
+          <a:p>
+            <a:endParaRPr lang="en-US" b="1" dirty="0"/>
+          </a:p>
+          <a:p>
+            <a:pPr marL="0" marR="0" lvl="0" indent="0" algn="l" defTabSz="914400" rtl="0" eaLnBrk="1" fontAlgn="auto" latinLnBrk="0" hangingPunct="1">
+              <a:lnSpc>
+                <a:spcPct val="100000"/>
+              </a:lnSpc>
+              <a:spcBef>
+                <a:spcPts val="0"/>
+              </a:spcBef>
+              <a:spcAft>
+                <a:spcPts val="0"/>
+              </a:spcAft>
+              <a:buClrTx/>
+              <a:buSzTx/>
+              <a:buFont typeface="Wingdings" panose="05000000000000000000" pitchFamily="2" charset="2"/>
+              <a:buNone/>
+              <a:tabLst/>
+              <a:defRPr/>
+            </a:pPr>
+            <a:r>
+              <a:rPr lang="en-US" dirty="0"/>
+              <a:t>----------------------------------------------</a:t>
+            </a:r>
+          </a:p>
+          <a:p>
+            <a:r>
+              <a:rPr lang="fr-BE" b="1" dirty="0"/>
+              <a:t>5-Fold CV</a:t>
+            </a:r>
+            <a:r>
+              <a:rPr lang="fr-BE" dirty="0"/>
+              <a:t>: </a:t>
+            </a:r>
+            <a:r>
+              <a:rPr lang="fr-BE" dirty="0" err="1"/>
+              <a:t>limits</a:t>
+            </a:r>
+            <a:r>
+              <a:rPr lang="fr-BE" dirty="0"/>
+              <a:t> </a:t>
+            </a:r>
+            <a:r>
+              <a:rPr lang="fr-BE" dirty="0" err="1"/>
+              <a:t>overfitting</a:t>
+            </a:r>
+            <a:r>
+              <a:rPr lang="fr-BE" dirty="0"/>
+              <a:t> </a:t>
+            </a:r>
+            <a:r>
+              <a:rPr lang="fr-BE" dirty="0" err="1"/>
+              <a:t>compared</a:t>
+            </a:r>
+            <a:r>
+              <a:rPr lang="fr-BE" dirty="0"/>
+              <a:t> to a single train-test split.</a:t>
+            </a:r>
+          </a:p>
+          <a:p>
+            <a:r>
+              <a:rPr lang="fr-BE" b="1" dirty="0" err="1"/>
+              <a:t>Early</a:t>
+            </a:r>
+            <a:r>
+              <a:rPr lang="fr-BE" b="1" dirty="0"/>
+              <a:t> </a:t>
+            </a:r>
+            <a:r>
+              <a:rPr lang="fr-BE" b="1" dirty="0" err="1"/>
+              <a:t>stopping</a:t>
+            </a:r>
+            <a:r>
+              <a:rPr lang="fr-BE" b="1" dirty="0"/>
+              <a:t> (50)</a:t>
+            </a:r>
+            <a:r>
+              <a:rPr lang="fr-BE" dirty="0"/>
+              <a:t>: stops training </a:t>
+            </a:r>
+            <a:r>
+              <a:rPr lang="fr-BE" dirty="0" err="1"/>
+              <a:t>when</a:t>
+            </a:r>
+            <a:r>
+              <a:rPr lang="fr-BE" dirty="0"/>
+              <a:t> validation performance </a:t>
+            </a:r>
+            <a:r>
+              <a:rPr lang="fr-BE" dirty="0" err="1"/>
+              <a:t>plateaus</a:t>
+            </a:r>
+            <a:r>
+              <a:rPr lang="fr-BE" dirty="0"/>
+              <a:t>.</a:t>
+            </a:r>
+          </a:p>
+          <a:p>
+            <a:r>
+              <a:rPr lang="fr-BE" b="1" dirty="0" err="1"/>
+              <a:t>Regularization</a:t>
+            </a:r>
+            <a:r>
+              <a:rPr lang="fr-BE" b="1" dirty="0"/>
+              <a:t> tuning via </a:t>
+            </a:r>
+            <a:r>
+              <a:rPr lang="fr-BE" b="1" dirty="0" err="1"/>
+              <a:t>Optuna</a:t>
+            </a:r>
+            <a:r>
+              <a:rPr lang="fr-BE" dirty="0"/>
+              <a:t>:</a:t>
+            </a:r>
+          </a:p>
+          <a:p>
+            <a:r>
+              <a:rPr lang="fr-BE" dirty="0"/>
+              <a:t>- l2_leaf_reg, </a:t>
+            </a:r>
+            <a:r>
+              <a:rPr lang="fr-BE" dirty="0" err="1"/>
+              <a:t>bagging_temperature</a:t>
+            </a:r>
+            <a:r>
+              <a:rPr lang="fr-BE" dirty="0"/>
+              <a:t>, </a:t>
+            </a:r>
+            <a:r>
+              <a:rPr lang="fr-BE" dirty="0" err="1"/>
+              <a:t>random_strength</a:t>
+            </a:r>
+            <a:endParaRPr lang="fr-BE" dirty="0"/>
+          </a:p>
+          <a:p>
+            <a:r>
+              <a:rPr lang="fr-BE" dirty="0"/>
+              <a:t>- </a:t>
+            </a:r>
+            <a:r>
+              <a:rPr lang="fr-BE" dirty="0" err="1"/>
+              <a:t>depth</a:t>
+            </a:r>
+            <a:r>
+              <a:rPr lang="fr-BE" dirty="0"/>
+              <a:t> (4–8), </a:t>
+            </a:r>
+            <a:r>
+              <a:rPr lang="fr-BE" dirty="0" err="1"/>
+              <a:t>iterations</a:t>
+            </a:r>
+            <a:r>
+              <a:rPr lang="fr-BE" dirty="0"/>
+              <a:t> (300–1000), </a:t>
+            </a:r>
+            <a:r>
+              <a:rPr lang="fr-BE" dirty="0" err="1"/>
+              <a:t>learning_rate</a:t>
+            </a:r>
+            <a:endParaRPr lang="fr-BE" dirty="0"/>
+          </a:p>
+          <a:p>
+            <a:r>
+              <a:rPr lang="fr-BE" b="1" dirty="0" err="1"/>
+              <a:t>CatBoost</a:t>
+            </a:r>
+            <a:r>
+              <a:rPr lang="fr-BE" dirty="0"/>
+              <a:t>: </a:t>
+            </a:r>
+            <a:r>
+              <a:rPr lang="fr-BE" dirty="0" err="1"/>
+              <a:t>ordered</a:t>
+            </a:r>
+            <a:r>
+              <a:rPr lang="fr-BE" dirty="0"/>
+              <a:t> </a:t>
+            </a:r>
+            <a:r>
+              <a:rPr lang="fr-BE" dirty="0" err="1"/>
+              <a:t>boosting</a:t>
+            </a:r>
+            <a:r>
+              <a:rPr lang="fr-BE" dirty="0"/>
+              <a:t>, </a:t>
+            </a:r>
+            <a:r>
+              <a:rPr lang="fr-BE" dirty="0" err="1"/>
+              <a:t>strong</a:t>
+            </a:r>
+            <a:r>
+              <a:rPr lang="fr-BE" dirty="0"/>
+              <a:t> </a:t>
+            </a:r>
+            <a:r>
+              <a:rPr lang="fr-BE" dirty="0" err="1"/>
+              <a:t>with</a:t>
+            </a:r>
+            <a:r>
+              <a:rPr lang="fr-BE" dirty="0"/>
+              <a:t> </a:t>
+            </a:r>
+            <a:r>
+              <a:rPr lang="fr-BE" dirty="0" err="1"/>
+              <a:t>categorical</a:t>
+            </a:r>
+            <a:r>
+              <a:rPr lang="fr-BE" dirty="0"/>
+              <a:t> </a:t>
+            </a:r>
+            <a:r>
+              <a:rPr lang="fr-BE" dirty="0" err="1"/>
+              <a:t>features</a:t>
+            </a:r>
+            <a:r>
+              <a:rPr lang="fr-BE" dirty="0"/>
+              <a:t>.</a:t>
+            </a:r>
+          </a:p>
+          <a:p>
+            <a:r>
+              <a:rPr lang="fr-BE" b="1" dirty="0"/>
+              <a:t>Validation RMSE as </a:t>
+            </a:r>
+            <a:r>
+              <a:rPr lang="fr-BE" b="1" dirty="0" err="1"/>
+              <a:t>optimization</a:t>
+            </a:r>
+            <a:r>
+              <a:rPr lang="fr-BE" b="1" dirty="0"/>
+              <a:t> </a:t>
+            </a:r>
+            <a:r>
+              <a:rPr lang="fr-BE" b="1" dirty="0" err="1"/>
+              <a:t>target</a:t>
+            </a:r>
+            <a:r>
+              <a:rPr lang="fr-BE" dirty="0"/>
+              <a:t>: </a:t>
+            </a:r>
+            <a:r>
+              <a:rPr lang="fr-BE" dirty="0" err="1"/>
+              <a:t>discourages</a:t>
+            </a:r>
+            <a:r>
+              <a:rPr lang="fr-BE" dirty="0"/>
+              <a:t> </a:t>
+            </a:r>
+            <a:r>
+              <a:rPr lang="fr-BE" dirty="0" err="1"/>
+              <a:t>overfitting</a:t>
+            </a:r>
+            <a:r>
+              <a:rPr lang="fr-BE" dirty="0"/>
+              <a:t>.</a:t>
+            </a:r>
+          </a:p>
+          <a:p>
+            <a:pPr marL="0" marR="0" lvl="0" indent="0" algn="l" defTabSz="914400" rtl="0" eaLnBrk="1" fontAlgn="auto" latinLnBrk="0" hangingPunct="1">
+              <a:lnSpc>
+                <a:spcPct val="100000"/>
+              </a:lnSpc>
+              <a:spcBef>
+                <a:spcPts val="0"/>
+              </a:spcBef>
+              <a:spcAft>
+                <a:spcPts val="0"/>
+              </a:spcAft>
+              <a:buClrTx/>
+              <a:buSzTx/>
+              <a:buFontTx/>
+              <a:buNone/>
+              <a:tabLst/>
+              <a:defRPr/>
+            </a:pPr>
+            <a:r>
+              <a:rPr lang="en-US" noProof="0" dirty="0"/>
+              <a:t>----------------------------------------------</a:t>
+            </a:r>
+          </a:p>
+          <a:p>
+            <a:endParaRPr lang="en-US" b="1" dirty="0"/>
+          </a:p>
+          <a:p>
+            <a:endParaRPr lang="en-US" b="1" dirty="0"/>
+          </a:p>
+          <a:p>
+            <a:endParaRPr lang="en-US" b="1" dirty="0"/>
+          </a:p>
+          <a:p>
+            <a:endParaRPr lang="en-US" b="1" dirty="0"/>
+          </a:p>
+          <a:p>
+            <a:endParaRPr lang="en-US" b="1" dirty="0"/>
+          </a:p>
+          <a:p>
+            <a:endParaRPr lang="en-US" b="1" dirty="0"/>
+          </a:p>
+          <a:p>
+            <a:endParaRPr lang="en-US" b="1" dirty="0"/>
+          </a:p>
+          <a:p>
+            <a:endParaRPr lang="en-US" b="1" dirty="0"/>
+          </a:p>
+          <a:p>
+            <a:endParaRPr lang="en-US" b="1" dirty="0"/>
+          </a:p>
+          <a:p>
+            <a:endParaRPr lang="en-US" b="1" dirty="0"/>
+          </a:p>
+          <a:p>
+            <a:endParaRPr lang="en-US" b="1" dirty="0"/>
+          </a:p>
+          <a:p>
+            <a:endParaRPr lang="en-US" b="1" dirty="0"/>
           </a:p>
         </p:txBody>
       </p:sp>
